--- a/presentacion/Proyecto Final SE.pptx
+++ b/presentacion/Proyecto Final SE.pptx
@@ -4582,7 +4582,7 @@
             <a:tbl>
               <a:tblPr>
                 <a:noFill/>
-                <a:tableStyleId>{E13A5F95-67B5-405F-AF4B-8CF3A6EC5DF9}</a:tableStyleId>
+                <a:tableStyleId>{09EAF370-753F-45E0-B635-B15873B5B262}</a:tableStyleId>
               </a:tblPr>
               <a:tblGrid>
                 <a:gridCol w="2875725"/>
@@ -9718,7 +9718,7 @@
                 <a:cs typeface="Mukta"/>
                 <a:sym typeface="Mukta"/>
               </a:rPr>
-              <a:t>Regulación de velocidad por PWM y control de sentido mediante puente H para empuje firme.</a:t>
+              <a:t>Regulación de velocidad por PWM y control de sentido</a:t>
             </a:r>
             <a:endParaRPr b="0" i="0" sz="1200" u="none" cap="none" strike="noStrike">
               <a:solidFill>
@@ -9810,8 +9810,8 @@
         </p:nvSpPr>
         <p:spPr>
           <a:xfrm>
-            <a:off x="2857500" y="2376190"/>
-            <a:ext cx="1257300" cy="494407"/>
+            <a:off x="2857500" y="2376200"/>
+            <a:ext cx="1420800" cy="494400"/>
           </a:xfrm>
           <a:prstGeom prst="rect">
             <a:avLst/>
@@ -9920,7 +9920,7 @@
                 <a:cs typeface="Mukta"/>
                 <a:sym typeface="Mukta"/>
               </a:rPr>
-              <a:t>Enlace inalámbrico por UART con HC-05 para operación sin cables desde aplicación móvil.</a:t>
+              <a:t>Enlace inalámbrico sin cables desde aplicación móvil.</a:t>
             </a:r>
             <a:endParaRPr b="0" i="0" sz="1200" u="none" cap="none" strike="noStrike">
               <a:solidFill>
@@ -10324,7 +10324,7 @@
                 <a:cs typeface="Mukta"/>
                 <a:sym typeface="Mukta"/>
               </a:rPr>
-              <a:t>Accionamiento digital de carga inductiva con transistor MOSFET de potencia aislado del MCU.</a:t>
+              <a:t>Accionamiento digital de carga inductiva con transistor MOSFET </a:t>
             </a:r>
             <a:endParaRPr b="0" i="0" sz="1200" u="none" cap="none" strike="noStrike">
               <a:solidFill>
